--- a/public/videos/repositories/maportal/maportal-tech-preview.pptx
+++ b/public/videos/repositories/maportal/maportal-tech-preview.pptx
@@ -134,7 +134,7 @@
           <p:cNvPr id="2" name="タイトル 1">
             <a:extLst>
               <a:ext uri="{FF2B5EF4-FFF2-40B4-BE49-F238E27FC236}">
-                <a16:creationId xmlns:a16="http://schemas.microsoft.com/office/drawing/2014/main" id="{37CE8D6E-7A8A-8793-6A0B-3B5B9F9EBF62}"/>
+                <a16:creationId xmlns:a16="http://schemas.microsoft.com/office/drawing/2014/main" id="{25C1935F-F32A-6761-3FBB-4E0FA1B29DC1}"/>
               </a:ext>
             </a:extLst>
           </p:cNvPr>
@@ -171,7 +171,7 @@
           <p:cNvPr id="3" name="字幕 2">
             <a:extLst>
               <a:ext uri="{FF2B5EF4-FFF2-40B4-BE49-F238E27FC236}">
-                <a16:creationId xmlns:a16="http://schemas.microsoft.com/office/drawing/2014/main" id="{0DD824F3-CCC6-3381-95AC-938EBB355A1D}"/>
+                <a16:creationId xmlns:a16="http://schemas.microsoft.com/office/drawing/2014/main" id="{61A9C487-9DAF-4F2E-0B48-BA9D16ED64A1}"/>
               </a:ext>
             </a:extLst>
           </p:cNvPr>
@@ -241,7 +241,7 @@
           <p:cNvPr id="4" name="日付プレースホルダー 3">
             <a:extLst>
               <a:ext uri="{FF2B5EF4-FFF2-40B4-BE49-F238E27FC236}">
-                <a16:creationId xmlns:a16="http://schemas.microsoft.com/office/drawing/2014/main" id="{DFEC6BDC-4A83-BA84-6B58-5AF136CEBBA8}"/>
+                <a16:creationId xmlns:a16="http://schemas.microsoft.com/office/drawing/2014/main" id="{3F16C2D5-C56F-4DF0-1950-7D4603A4EFBD}"/>
               </a:ext>
             </a:extLst>
           </p:cNvPr>
@@ -257,7 +257,7 @@
           <a:bodyPr/>
           <a:lstStyle/>
           <a:p>
-            <a:fld id="{DF0BA341-327E-4242-8688-DA5EC4A77CBF}" type="datetimeFigureOut">
+            <a:fld id="{C82431CF-C761-478F-804C-390EDFAC065B}" type="datetimeFigureOut">
               <a:rPr kumimoji="1" lang="ja-JP" altLang="en-US" smtClean="0"/>
               <a:t>2026/7/30</a:t>
             </a:fld>
@@ -270,7 +270,7 @@
           <p:cNvPr id="5" name="フッター プレースホルダー 4">
             <a:extLst>
               <a:ext uri="{FF2B5EF4-FFF2-40B4-BE49-F238E27FC236}">
-                <a16:creationId xmlns:a16="http://schemas.microsoft.com/office/drawing/2014/main" id="{D29D9568-A1F5-D701-7483-FDAEAB0F3F1F}"/>
+                <a16:creationId xmlns:a16="http://schemas.microsoft.com/office/drawing/2014/main" id="{1FE768C5-573E-4465-53F2-760E8C11E293}"/>
               </a:ext>
             </a:extLst>
           </p:cNvPr>
@@ -295,7 +295,7 @@
           <p:cNvPr id="6" name="スライド番号プレースホルダー 5">
             <a:extLst>
               <a:ext uri="{FF2B5EF4-FFF2-40B4-BE49-F238E27FC236}">
-                <a16:creationId xmlns:a16="http://schemas.microsoft.com/office/drawing/2014/main" id="{990BD6F8-58C3-207D-79EC-F9AB37C2DBFE}"/>
+                <a16:creationId xmlns:a16="http://schemas.microsoft.com/office/drawing/2014/main" id="{BF596847-6B9A-BE20-D724-4073319AF625}"/>
               </a:ext>
             </a:extLst>
           </p:cNvPr>
@@ -311,7 +311,7 @@
           <a:bodyPr/>
           <a:lstStyle/>
           <a:p>
-            <a:fld id="{D2F7B7C4-E944-4279-872F-15C41B69375C}" type="slidenum">
+            <a:fld id="{641DED6D-F7AB-4317-AC7A-C5F80A67EA1D}" type="slidenum">
               <a:rPr kumimoji="1" lang="ja-JP" altLang="en-US" smtClean="0"/>
               <a:t>‹#›</a:t>
             </a:fld>
@@ -322,7 +322,7 @@
     </p:spTree>
     <p:extLst>
       <p:ext uri="{BB962C8B-B14F-4D97-AF65-F5344CB8AC3E}">
-        <p14:creationId xmlns:p14="http://schemas.microsoft.com/office/powerpoint/2010/main" val="3193480394"/>
+        <p14:creationId xmlns:p14="http://schemas.microsoft.com/office/powerpoint/2010/main" val="2376999616"/>
       </p:ext>
     </p:extLst>
   </p:cSld>
@@ -354,7 +354,7 @@
           <p:cNvPr id="2" name="タイトル 1">
             <a:extLst>
               <a:ext uri="{FF2B5EF4-FFF2-40B4-BE49-F238E27FC236}">
-                <a16:creationId xmlns:a16="http://schemas.microsoft.com/office/drawing/2014/main" id="{3E08CFEB-14A7-5BEA-DB65-5387D0FEAB95}"/>
+                <a16:creationId xmlns:a16="http://schemas.microsoft.com/office/drawing/2014/main" id="{D78616E7-7CB1-B660-926D-EC82D4DF7A59}"/>
               </a:ext>
             </a:extLst>
           </p:cNvPr>
@@ -382,7 +382,7 @@
           <p:cNvPr id="3" name="縦書きテキスト プレースホルダー 2">
             <a:extLst>
               <a:ext uri="{FF2B5EF4-FFF2-40B4-BE49-F238E27FC236}">
-                <a16:creationId xmlns:a16="http://schemas.microsoft.com/office/drawing/2014/main" id="{E8A088BA-EB0A-A361-226B-237F685F2447}"/>
+                <a16:creationId xmlns:a16="http://schemas.microsoft.com/office/drawing/2014/main" id="{D53AC654-41C5-9BD6-16A9-1D15207AC3B6}"/>
               </a:ext>
             </a:extLst>
           </p:cNvPr>
@@ -471,7 +471,7 @@
           <p:cNvPr id="4" name="日付プレースホルダー 3">
             <a:extLst>
               <a:ext uri="{FF2B5EF4-FFF2-40B4-BE49-F238E27FC236}">
-                <a16:creationId xmlns:a16="http://schemas.microsoft.com/office/drawing/2014/main" id="{8C73F575-D9DF-5CE3-7AAB-60B13B64A290}"/>
+                <a16:creationId xmlns:a16="http://schemas.microsoft.com/office/drawing/2014/main" id="{4A9D0C98-F9BB-8E95-6258-AFE40463C4F6}"/>
               </a:ext>
             </a:extLst>
           </p:cNvPr>
@@ -487,7 +487,7 @@
           <a:bodyPr/>
           <a:lstStyle/>
           <a:p>
-            <a:fld id="{DF0BA341-327E-4242-8688-DA5EC4A77CBF}" type="datetimeFigureOut">
+            <a:fld id="{C82431CF-C761-478F-804C-390EDFAC065B}" type="datetimeFigureOut">
               <a:rPr kumimoji="1" lang="ja-JP" altLang="en-US" smtClean="0"/>
               <a:t>2026/7/30</a:t>
             </a:fld>
@@ -500,7 +500,7 @@
           <p:cNvPr id="5" name="フッター プレースホルダー 4">
             <a:extLst>
               <a:ext uri="{FF2B5EF4-FFF2-40B4-BE49-F238E27FC236}">
-                <a16:creationId xmlns:a16="http://schemas.microsoft.com/office/drawing/2014/main" id="{07BA7FB2-90DB-C7F4-C610-8D2EB3C87913}"/>
+                <a16:creationId xmlns:a16="http://schemas.microsoft.com/office/drawing/2014/main" id="{7B118269-B38D-126E-DCFC-037FADE81984}"/>
               </a:ext>
             </a:extLst>
           </p:cNvPr>
@@ -525,7 +525,7 @@
           <p:cNvPr id="6" name="スライド番号プレースホルダー 5">
             <a:extLst>
               <a:ext uri="{FF2B5EF4-FFF2-40B4-BE49-F238E27FC236}">
-                <a16:creationId xmlns:a16="http://schemas.microsoft.com/office/drawing/2014/main" id="{18469682-7817-9E95-A179-FA24741D19CF}"/>
+                <a16:creationId xmlns:a16="http://schemas.microsoft.com/office/drawing/2014/main" id="{E85CAE8B-B118-F2AA-1801-F03D7BBC434F}"/>
               </a:ext>
             </a:extLst>
           </p:cNvPr>
@@ -541,7 +541,7 @@
           <a:bodyPr/>
           <a:lstStyle/>
           <a:p>
-            <a:fld id="{D2F7B7C4-E944-4279-872F-15C41B69375C}" type="slidenum">
+            <a:fld id="{641DED6D-F7AB-4317-AC7A-C5F80A67EA1D}" type="slidenum">
               <a:rPr kumimoji="1" lang="ja-JP" altLang="en-US" smtClean="0"/>
               <a:t>‹#›</a:t>
             </a:fld>
@@ -552,7 +552,7 @@
     </p:spTree>
     <p:extLst>
       <p:ext uri="{BB962C8B-B14F-4D97-AF65-F5344CB8AC3E}">
-        <p14:creationId xmlns:p14="http://schemas.microsoft.com/office/powerpoint/2010/main" val="1334303847"/>
+        <p14:creationId xmlns:p14="http://schemas.microsoft.com/office/powerpoint/2010/main" val="1794637279"/>
       </p:ext>
     </p:extLst>
   </p:cSld>
@@ -584,7 +584,7 @@
           <p:cNvPr id="2" name="縦書きタイトル 1">
             <a:extLst>
               <a:ext uri="{FF2B5EF4-FFF2-40B4-BE49-F238E27FC236}">
-                <a16:creationId xmlns:a16="http://schemas.microsoft.com/office/drawing/2014/main" id="{F3988D6E-4BBB-66FE-C623-16A55C37CB03}"/>
+                <a16:creationId xmlns:a16="http://schemas.microsoft.com/office/drawing/2014/main" id="{CA339B45-0556-E966-153E-E2D0C8D4BF1D}"/>
               </a:ext>
             </a:extLst>
           </p:cNvPr>
@@ -617,7 +617,7 @@
           <p:cNvPr id="3" name="縦書きテキスト プレースホルダー 2">
             <a:extLst>
               <a:ext uri="{FF2B5EF4-FFF2-40B4-BE49-F238E27FC236}">
-                <a16:creationId xmlns:a16="http://schemas.microsoft.com/office/drawing/2014/main" id="{7D5E7601-22C5-33C6-F37C-C12217E78EA6}"/>
+                <a16:creationId xmlns:a16="http://schemas.microsoft.com/office/drawing/2014/main" id="{A02FFCCC-5DA0-CE38-C0A8-4260CB000716}"/>
               </a:ext>
             </a:extLst>
           </p:cNvPr>
@@ -711,7 +711,7 @@
           <p:cNvPr id="4" name="日付プレースホルダー 3">
             <a:extLst>
               <a:ext uri="{FF2B5EF4-FFF2-40B4-BE49-F238E27FC236}">
-                <a16:creationId xmlns:a16="http://schemas.microsoft.com/office/drawing/2014/main" id="{8F96A8D4-8DE3-388F-6B3E-118380F75060}"/>
+                <a16:creationId xmlns:a16="http://schemas.microsoft.com/office/drawing/2014/main" id="{9F1FC3D9-5E58-5528-F75F-8DA1C889D6D4}"/>
               </a:ext>
             </a:extLst>
           </p:cNvPr>
@@ -727,7 +727,7 @@
           <a:bodyPr/>
           <a:lstStyle/>
           <a:p>
-            <a:fld id="{DF0BA341-327E-4242-8688-DA5EC4A77CBF}" type="datetimeFigureOut">
+            <a:fld id="{C82431CF-C761-478F-804C-390EDFAC065B}" type="datetimeFigureOut">
               <a:rPr kumimoji="1" lang="ja-JP" altLang="en-US" smtClean="0"/>
               <a:t>2026/7/30</a:t>
             </a:fld>
@@ -740,7 +740,7 @@
           <p:cNvPr id="5" name="フッター プレースホルダー 4">
             <a:extLst>
               <a:ext uri="{FF2B5EF4-FFF2-40B4-BE49-F238E27FC236}">
-                <a16:creationId xmlns:a16="http://schemas.microsoft.com/office/drawing/2014/main" id="{1A858786-8A87-8FCA-6783-1BCC65EF2961}"/>
+                <a16:creationId xmlns:a16="http://schemas.microsoft.com/office/drawing/2014/main" id="{F1A263BF-9B55-723F-BBF3-A168F73E6CEF}"/>
               </a:ext>
             </a:extLst>
           </p:cNvPr>
@@ -765,7 +765,7 @@
           <p:cNvPr id="6" name="スライド番号プレースホルダー 5">
             <a:extLst>
               <a:ext uri="{FF2B5EF4-FFF2-40B4-BE49-F238E27FC236}">
-                <a16:creationId xmlns:a16="http://schemas.microsoft.com/office/drawing/2014/main" id="{620F7708-17AA-69EE-426B-C8E6952F611E}"/>
+                <a16:creationId xmlns:a16="http://schemas.microsoft.com/office/drawing/2014/main" id="{B784862A-42F5-9158-7FC2-FD884CA406B1}"/>
               </a:ext>
             </a:extLst>
           </p:cNvPr>
@@ -781,7 +781,7 @@
           <a:bodyPr/>
           <a:lstStyle/>
           <a:p>
-            <a:fld id="{D2F7B7C4-E944-4279-872F-15C41B69375C}" type="slidenum">
+            <a:fld id="{641DED6D-F7AB-4317-AC7A-C5F80A67EA1D}" type="slidenum">
               <a:rPr kumimoji="1" lang="ja-JP" altLang="en-US" smtClean="0"/>
               <a:t>‹#›</a:t>
             </a:fld>
@@ -792,7 +792,7 @@
     </p:spTree>
     <p:extLst>
       <p:ext uri="{BB962C8B-B14F-4D97-AF65-F5344CB8AC3E}">
-        <p14:creationId xmlns:p14="http://schemas.microsoft.com/office/powerpoint/2010/main" val="1015387239"/>
+        <p14:creationId xmlns:p14="http://schemas.microsoft.com/office/powerpoint/2010/main" val="2096017859"/>
       </p:ext>
     </p:extLst>
   </p:cSld>
@@ -824,7 +824,7 @@
           <p:cNvPr id="2" name="タイトル 1">
             <a:extLst>
               <a:ext uri="{FF2B5EF4-FFF2-40B4-BE49-F238E27FC236}">
-                <a16:creationId xmlns:a16="http://schemas.microsoft.com/office/drawing/2014/main" id="{B47200CA-16D1-1CCB-153D-B44DB7C19401}"/>
+                <a16:creationId xmlns:a16="http://schemas.microsoft.com/office/drawing/2014/main" id="{DCF06529-30BE-96DB-4A0A-A0DE236D0EB9}"/>
               </a:ext>
             </a:extLst>
           </p:cNvPr>
@@ -852,7 +852,7 @@
           <p:cNvPr id="3" name="コンテンツ プレースホルダー 2">
             <a:extLst>
               <a:ext uri="{FF2B5EF4-FFF2-40B4-BE49-F238E27FC236}">
-                <a16:creationId xmlns:a16="http://schemas.microsoft.com/office/drawing/2014/main" id="{05B86B97-5944-8B8D-CE31-E0AB7C050B84}"/>
+                <a16:creationId xmlns:a16="http://schemas.microsoft.com/office/drawing/2014/main" id="{7C6E24CA-ACFF-941E-E247-57CAD1422F44}"/>
               </a:ext>
             </a:extLst>
           </p:cNvPr>
@@ -941,7 +941,7 @@
           <p:cNvPr id="4" name="日付プレースホルダー 3">
             <a:extLst>
               <a:ext uri="{FF2B5EF4-FFF2-40B4-BE49-F238E27FC236}">
-                <a16:creationId xmlns:a16="http://schemas.microsoft.com/office/drawing/2014/main" id="{EAB18935-98C8-0E98-D5B7-841E697F7D28}"/>
+                <a16:creationId xmlns:a16="http://schemas.microsoft.com/office/drawing/2014/main" id="{7437E7BA-D0CE-7228-916C-0860A6D9902F}"/>
               </a:ext>
             </a:extLst>
           </p:cNvPr>
@@ -957,7 +957,7 @@
           <a:bodyPr/>
           <a:lstStyle/>
           <a:p>
-            <a:fld id="{DF0BA341-327E-4242-8688-DA5EC4A77CBF}" type="datetimeFigureOut">
+            <a:fld id="{C82431CF-C761-478F-804C-390EDFAC065B}" type="datetimeFigureOut">
               <a:rPr kumimoji="1" lang="ja-JP" altLang="en-US" smtClean="0"/>
               <a:t>2026/7/30</a:t>
             </a:fld>
@@ -970,7 +970,7 @@
           <p:cNvPr id="5" name="フッター プレースホルダー 4">
             <a:extLst>
               <a:ext uri="{FF2B5EF4-FFF2-40B4-BE49-F238E27FC236}">
-                <a16:creationId xmlns:a16="http://schemas.microsoft.com/office/drawing/2014/main" id="{F164EC10-76F2-A513-0F5A-FD7276BBB645}"/>
+                <a16:creationId xmlns:a16="http://schemas.microsoft.com/office/drawing/2014/main" id="{D8B23EA0-1D93-4A0F-1F0A-50F288506FFD}"/>
               </a:ext>
             </a:extLst>
           </p:cNvPr>
@@ -995,7 +995,7 @@
           <p:cNvPr id="6" name="スライド番号プレースホルダー 5">
             <a:extLst>
               <a:ext uri="{FF2B5EF4-FFF2-40B4-BE49-F238E27FC236}">
-                <a16:creationId xmlns:a16="http://schemas.microsoft.com/office/drawing/2014/main" id="{3F360168-EB19-F8F1-490E-1F9D5485F673}"/>
+                <a16:creationId xmlns:a16="http://schemas.microsoft.com/office/drawing/2014/main" id="{F0C994E8-9F87-3915-E709-77A8A791B871}"/>
               </a:ext>
             </a:extLst>
           </p:cNvPr>
@@ -1011,7 +1011,7 @@
           <a:bodyPr/>
           <a:lstStyle/>
           <a:p>
-            <a:fld id="{D2F7B7C4-E944-4279-872F-15C41B69375C}" type="slidenum">
+            <a:fld id="{641DED6D-F7AB-4317-AC7A-C5F80A67EA1D}" type="slidenum">
               <a:rPr kumimoji="1" lang="ja-JP" altLang="en-US" smtClean="0"/>
               <a:t>‹#›</a:t>
             </a:fld>
@@ -1022,7 +1022,7 @@
     </p:spTree>
     <p:extLst>
       <p:ext uri="{BB962C8B-B14F-4D97-AF65-F5344CB8AC3E}">
-        <p14:creationId xmlns:p14="http://schemas.microsoft.com/office/powerpoint/2010/main" val="2582384062"/>
+        <p14:creationId xmlns:p14="http://schemas.microsoft.com/office/powerpoint/2010/main" val="4122208924"/>
       </p:ext>
     </p:extLst>
   </p:cSld>
@@ -1054,7 +1054,7 @@
           <p:cNvPr id="2" name="タイトル 1">
             <a:extLst>
               <a:ext uri="{FF2B5EF4-FFF2-40B4-BE49-F238E27FC236}">
-                <a16:creationId xmlns:a16="http://schemas.microsoft.com/office/drawing/2014/main" id="{B7ABFD0E-3D60-0C65-55F4-1CC508C12A48}"/>
+                <a16:creationId xmlns:a16="http://schemas.microsoft.com/office/drawing/2014/main" id="{C480A324-CD81-F7D8-D4A4-4424B08F3119}"/>
               </a:ext>
             </a:extLst>
           </p:cNvPr>
@@ -1091,7 +1091,7 @@
           <p:cNvPr id="3" name="テキスト プレースホルダー 2">
             <a:extLst>
               <a:ext uri="{FF2B5EF4-FFF2-40B4-BE49-F238E27FC236}">
-                <a16:creationId xmlns:a16="http://schemas.microsoft.com/office/drawing/2014/main" id="{D81F7262-144B-3374-9EFE-FC9B27768C06}"/>
+                <a16:creationId xmlns:a16="http://schemas.microsoft.com/office/drawing/2014/main" id="{E8892ACB-C84C-9B9C-7554-DB02F38D4197}"/>
               </a:ext>
             </a:extLst>
           </p:cNvPr>
@@ -1216,7 +1216,7 @@
           <p:cNvPr id="4" name="日付プレースホルダー 3">
             <a:extLst>
               <a:ext uri="{FF2B5EF4-FFF2-40B4-BE49-F238E27FC236}">
-                <a16:creationId xmlns:a16="http://schemas.microsoft.com/office/drawing/2014/main" id="{7F267880-A1B5-F563-F3FF-CF92E058E65C}"/>
+                <a16:creationId xmlns:a16="http://schemas.microsoft.com/office/drawing/2014/main" id="{EB054B40-19F9-73C2-D3EB-2184F6434F23}"/>
               </a:ext>
             </a:extLst>
           </p:cNvPr>
@@ -1232,7 +1232,7 @@
           <a:bodyPr/>
           <a:lstStyle/>
           <a:p>
-            <a:fld id="{DF0BA341-327E-4242-8688-DA5EC4A77CBF}" type="datetimeFigureOut">
+            <a:fld id="{C82431CF-C761-478F-804C-390EDFAC065B}" type="datetimeFigureOut">
               <a:rPr kumimoji="1" lang="ja-JP" altLang="en-US" smtClean="0"/>
               <a:t>2026/7/30</a:t>
             </a:fld>
@@ -1245,7 +1245,7 @@
           <p:cNvPr id="5" name="フッター プレースホルダー 4">
             <a:extLst>
               <a:ext uri="{FF2B5EF4-FFF2-40B4-BE49-F238E27FC236}">
-                <a16:creationId xmlns:a16="http://schemas.microsoft.com/office/drawing/2014/main" id="{7687A19C-2BAD-D98D-6FD6-658094E0ED54}"/>
+                <a16:creationId xmlns:a16="http://schemas.microsoft.com/office/drawing/2014/main" id="{014A7EAA-3881-0392-E00E-5E43BA18FAEB}"/>
               </a:ext>
             </a:extLst>
           </p:cNvPr>
@@ -1270,7 +1270,7 @@
           <p:cNvPr id="6" name="スライド番号プレースホルダー 5">
             <a:extLst>
               <a:ext uri="{FF2B5EF4-FFF2-40B4-BE49-F238E27FC236}">
-                <a16:creationId xmlns:a16="http://schemas.microsoft.com/office/drawing/2014/main" id="{B2AC57ED-0AFB-E320-2E25-E28D3633D398}"/>
+                <a16:creationId xmlns:a16="http://schemas.microsoft.com/office/drawing/2014/main" id="{A07C6CC7-1E80-32ED-9F16-C735F67D8BC8}"/>
               </a:ext>
             </a:extLst>
           </p:cNvPr>
@@ -1286,7 +1286,7 @@
           <a:bodyPr/>
           <a:lstStyle/>
           <a:p>
-            <a:fld id="{D2F7B7C4-E944-4279-872F-15C41B69375C}" type="slidenum">
+            <a:fld id="{641DED6D-F7AB-4317-AC7A-C5F80A67EA1D}" type="slidenum">
               <a:rPr kumimoji="1" lang="ja-JP" altLang="en-US" smtClean="0"/>
               <a:t>‹#›</a:t>
             </a:fld>
@@ -1297,7 +1297,7 @@
     </p:spTree>
     <p:extLst>
       <p:ext uri="{BB962C8B-B14F-4D97-AF65-F5344CB8AC3E}">
-        <p14:creationId xmlns:p14="http://schemas.microsoft.com/office/powerpoint/2010/main" val="524946858"/>
+        <p14:creationId xmlns:p14="http://schemas.microsoft.com/office/powerpoint/2010/main" val="731606919"/>
       </p:ext>
     </p:extLst>
   </p:cSld>
@@ -1329,7 +1329,7 @@
           <p:cNvPr id="2" name="タイトル 1">
             <a:extLst>
               <a:ext uri="{FF2B5EF4-FFF2-40B4-BE49-F238E27FC236}">
-                <a16:creationId xmlns:a16="http://schemas.microsoft.com/office/drawing/2014/main" id="{F3B0AB73-E02C-CB6F-406E-FE07C4E32FF4}"/>
+                <a16:creationId xmlns:a16="http://schemas.microsoft.com/office/drawing/2014/main" id="{17CB308D-C539-D1FC-4CA5-88DDD80C4928}"/>
               </a:ext>
             </a:extLst>
           </p:cNvPr>
@@ -1357,7 +1357,7 @@
           <p:cNvPr id="3" name="コンテンツ プレースホルダー 2">
             <a:extLst>
               <a:ext uri="{FF2B5EF4-FFF2-40B4-BE49-F238E27FC236}">
-                <a16:creationId xmlns:a16="http://schemas.microsoft.com/office/drawing/2014/main" id="{E3DEECB8-C757-5F05-4667-1938C718724C}"/>
+                <a16:creationId xmlns:a16="http://schemas.microsoft.com/office/drawing/2014/main" id="{B5087C62-4FBF-5226-3ACC-8D30EB46587D}"/>
               </a:ext>
             </a:extLst>
           </p:cNvPr>
@@ -1451,7 +1451,7 @@
           <p:cNvPr id="4" name="コンテンツ プレースホルダー 3">
             <a:extLst>
               <a:ext uri="{FF2B5EF4-FFF2-40B4-BE49-F238E27FC236}">
-                <a16:creationId xmlns:a16="http://schemas.microsoft.com/office/drawing/2014/main" id="{55620A0A-E44B-5982-73C1-3ECBADEA2D32}"/>
+                <a16:creationId xmlns:a16="http://schemas.microsoft.com/office/drawing/2014/main" id="{18206D4A-39CD-D279-5BBA-3C0AC6F290D0}"/>
               </a:ext>
             </a:extLst>
           </p:cNvPr>
@@ -1545,7 +1545,7 @@
           <p:cNvPr id="5" name="日付プレースホルダー 4">
             <a:extLst>
               <a:ext uri="{FF2B5EF4-FFF2-40B4-BE49-F238E27FC236}">
-                <a16:creationId xmlns:a16="http://schemas.microsoft.com/office/drawing/2014/main" id="{4D97AA1F-F861-2CFA-6412-9D0EB3A71C82}"/>
+                <a16:creationId xmlns:a16="http://schemas.microsoft.com/office/drawing/2014/main" id="{D03FA1A1-B2D9-ACA3-5E69-6E67FA9C7C6A}"/>
               </a:ext>
             </a:extLst>
           </p:cNvPr>
@@ -1561,7 +1561,7 @@
           <a:bodyPr/>
           <a:lstStyle/>
           <a:p>
-            <a:fld id="{DF0BA341-327E-4242-8688-DA5EC4A77CBF}" type="datetimeFigureOut">
+            <a:fld id="{C82431CF-C761-478F-804C-390EDFAC065B}" type="datetimeFigureOut">
               <a:rPr kumimoji="1" lang="ja-JP" altLang="en-US" smtClean="0"/>
               <a:t>2026/7/30</a:t>
             </a:fld>
@@ -1574,7 +1574,7 @@
           <p:cNvPr id="6" name="フッター プレースホルダー 5">
             <a:extLst>
               <a:ext uri="{FF2B5EF4-FFF2-40B4-BE49-F238E27FC236}">
-                <a16:creationId xmlns:a16="http://schemas.microsoft.com/office/drawing/2014/main" id="{BC498FB7-FA37-77E6-2F4D-1777DBC288CC}"/>
+                <a16:creationId xmlns:a16="http://schemas.microsoft.com/office/drawing/2014/main" id="{48948FDD-4035-3352-82DE-7F6B3E3D1A6E}"/>
               </a:ext>
             </a:extLst>
           </p:cNvPr>
@@ -1599,7 +1599,7 @@
           <p:cNvPr id="7" name="スライド番号プレースホルダー 6">
             <a:extLst>
               <a:ext uri="{FF2B5EF4-FFF2-40B4-BE49-F238E27FC236}">
-                <a16:creationId xmlns:a16="http://schemas.microsoft.com/office/drawing/2014/main" id="{30412B5E-98AC-2482-1F9E-4EBC7343716C}"/>
+                <a16:creationId xmlns:a16="http://schemas.microsoft.com/office/drawing/2014/main" id="{D1C69BD2-3130-BA45-CEAE-BB599877F626}"/>
               </a:ext>
             </a:extLst>
           </p:cNvPr>
@@ -1615,7 +1615,7 @@
           <a:bodyPr/>
           <a:lstStyle/>
           <a:p>
-            <a:fld id="{D2F7B7C4-E944-4279-872F-15C41B69375C}" type="slidenum">
+            <a:fld id="{641DED6D-F7AB-4317-AC7A-C5F80A67EA1D}" type="slidenum">
               <a:rPr kumimoji="1" lang="ja-JP" altLang="en-US" smtClean="0"/>
               <a:t>‹#›</a:t>
             </a:fld>
@@ -1626,7 +1626,7 @@
     </p:spTree>
     <p:extLst>
       <p:ext uri="{BB962C8B-B14F-4D97-AF65-F5344CB8AC3E}">
-        <p14:creationId xmlns:p14="http://schemas.microsoft.com/office/powerpoint/2010/main" val="1742313013"/>
+        <p14:creationId xmlns:p14="http://schemas.microsoft.com/office/powerpoint/2010/main" val="1464957246"/>
       </p:ext>
     </p:extLst>
   </p:cSld>
@@ -1658,7 +1658,7 @@
           <p:cNvPr id="2" name="タイトル 1">
             <a:extLst>
               <a:ext uri="{FF2B5EF4-FFF2-40B4-BE49-F238E27FC236}">
-                <a16:creationId xmlns:a16="http://schemas.microsoft.com/office/drawing/2014/main" id="{8A38A6CA-F0FE-C77E-D502-965684E528B0}"/>
+                <a16:creationId xmlns:a16="http://schemas.microsoft.com/office/drawing/2014/main" id="{A7692024-CFC3-ADDB-6830-E75F02298D1D}"/>
               </a:ext>
             </a:extLst>
           </p:cNvPr>
@@ -1691,7 +1691,7 @@
           <p:cNvPr id="3" name="テキスト プレースホルダー 2">
             <a:extLst>
               <a:ext uri="{FF2B5EF4-FFF2-40B4-BE49-F238E27FC236}">
-                <a16:creationId xmlns:a16="http://schemas.microsoft.com/office/drawing/2014/main" id="{7E77EEE6-9545-B263-C661-74C3BFA7E1F9}"/>
+                <a16:creationId xmlns:a16="http://schemas.microsoft.com/office/drawing/2014/main" id="{6A871270-FCD4-9320-9083-D58F029D9D5A}"/>
               </a:ext>
             </a:extLst>
           </p:cNvPr>
@@ -1762,7 +1762,7 @@
           <p:cNvPr id="4" name="コンテンツ プレースホルダー 3">
             <a:extLst>
               <a:ext uri="{FF2B5EF4-FFF2-40B4-BE49-F238E27FC236}">
-                <a16:creationId xmlns:a16="http://schemas.microsoft.com/office/drawing/2014/main" id="{5E3325A0-163C-95DD-8629-D9AA51371E69}"/>
+                <a16:creationId xmlns:a16="http://schemas.microsoft.com/office/drawing/2014/main" id="{22CA22E3-FCD8-B64B-7B2D-39B5CBEA913C}"/>
               </a:ext>
             </a:extLst>
           </p:cNvPr>
@@ -1856,7 +1856,7 @@
           <p:cNvPr id="5" name="テキスト プレースホルダー 4">
             <a:extLst>
               <a:ext uri="{FF2B5EF4-FFF2-40B4-BE49-F238E27FC236}">
-                <a16:creationId xmlns:a16="http://schemas.microsoft.com/office/drawing/2014/main" id="{0B575F61-362E-AA34-8AC0-1E674DF8F490}"/>
+                <a16:creationId xmlns:a16="http://schemas.microsoft.com/office/drawing/2014/main" id="{E9338D44-6F20-CA22-E696-1E4CCFF75E3B}"/>
               </a:ext>
             </a:extLst>
           </p:cNvPr>
@@ -1927,7 +1927,7 @@
           <p:cNvPr id="6" name="コンテンツ プレースホルダー 5">
             <a:extLst>
               <a:ext uri="{FF2B5EF4-FFF2-40B4-BE49-F238E27FC236}">
-                <a16:creationId xmlns:a16="http://schemas.microsoft.com/office/drawing/2014/main" id="{2CF4F3B6-652F-1588-D62C-369E0C4BCF7A}"/>
+                <a16:creationId xmlns:a16="http://schemas.microsoft.com/office/drawing/2014/main" id="{81A1B144-B2DF-45AC-C23E-3D19E2101827}"/>
               </a:ext>
             </a:extLst>
           </p:cNvPr>
@@ -2021,7 +2021,7 @@
           <p:cNvPr id="7" name="日付プレースホルダー 6">
             <a:extLst>
               <a:ext uri="{FF2B5EF4-FFF2-40B4-BE49-F238E27FC236}">
-                <a16:creationId xmlns:a16="http://schemas.microsoft.com/office/drawing/2014/main" id="{B9F83E42-BA01-87CB-BF45-6B8A4DF989F5}"/>
+                <a16:creationId xmlns:a16="http://schemas.microsoft.com/office/drawing/2014/main" id="{C1BA49F4-2308-7347-878B-A1D55D149C53}"/>
               </a:ext>
             </a:extLst>
           </p:cNvPr>
@@ -2037,7 +2037,7 @@
           <a:bodyPr/>
           <a:lstStyle/>
           <a:p>
-            <a:fld id="{DF0BA341-327E-4242-8688-DA5EC4A77CBF}" type="datetimeFigureOut">
+            <a:fld id="{C82431CF-C761-478F-804C-390EDFAC065B}" type="datetimeFigureOut">
               <a:rPr kumimoji="1" lang="ja-JP" altLang="en-US" smtClean="0"/>
               <a:t>2026/7/30</a:t>
             </a:fld>
@@ -2050,7 +2050,7 @@
           <p:cNvPr id="8" name="フッター プレースホルダー 7">
             <a:extLst>
               <a:ext uri="{FF2B5EF4-FFF2-40B4-BE49-F238E27FC236}">
-                <a16:creationId xmlns:a16="http://schemas.microsoft.com/office/drawing/2014/main" id="{18EC53FB-B46E-8577-285C-17FC8D50C466}"/>
+                <a16:creationId xmlns:a16="http://schemas.microsoft.com/office/drawing/2014/main" id="{E26583EC-CC22-25CC-B2CA-15C07084D83A}"/>
               </a:ext>
             </a:extLst>
           </p:cNvPr>
@@ -2075,7 +2075,7 @@
           <p:cNvPr id="9" name="スライド番号プレースホルダー 8">
             <a:extLst>
               <a:ext uri="{FF2B5EF4-FFF2-40B4-BE49-F238E27FC236}">
-                <a16:creationId xmlns:a16="http://schemas.microsoft.com/office/drawing/2014/main" id="{D0E69CD1-A87E-45FC-99FD-72126A74C90D}"/>
+                <a16:creationId xmlns:a16="http://schemas.microsoft.com/office/drawing/2014/main" id="{12DD71E7-DDCC-BE98-D9E2-150FEE95B924}"/>
               </a:ext>
             </a:extLst>
           </p:cNvPr>
@@ -2091,7 +2091,7 @@
           <a:bodyPr/>
           <a:lstStyle/>
           <a:p>
-            <a:fld id="{D2F7B7C4-E944-4279-872F-15C41B69375C}" type="slidenum">
+            <a:fld id="{641DED6D-F7AB-4317-AC7A-C5F80A67EA1D}" type="slidenum">
               <a:rPr kumimoji="1" lang="ja-JP" altLang="en-US" smtClean="0"/>
               <a:t>‹#›</a:t>
             </a:fld>
@@ -2102,7 +2102,7 @@
     </p:spTree>
     <p:extLst>
       <p:ext uri="{BB962C8B-B14F-4D97-AF65-F5344CB8AC3E}">
-        <p14:creationId xmlns:p14="http://schemas.microsoft.com/office/powerpoint/2010/main" val="1857025264"/>
+        <p14:creationId xmlns:p14="http://schemas.microsoft.com/office/powerpoint/2010/main" val="720132699"/>
       </p:ext>
     </p:extLst>
   </p:cSld>
@@ -2134,7 +2134,7 @@
           <p:cNvPr id="2" name="タイトル 1">
             <a:extLst>
               <a:ext uri="{FF2B5EF4-FFF2-40B4-BE49-F238E27FC236}">
-                <a16:creationId xmlns:a16="http://schemas.microsoft.com/office/drawing/2014/main" id="{9AA3A2CF-B12B-1576-4A78-CCD0AF9B7EE3}"/>
+                <a16:creationId xmlns:a16="http://schemas.microsoft.com/office/drawing/2014/main" id="{1B481EEC-2EE5-2648-AA9D-54114B1AE084}"/>
               </a:ext>
             </a:extLst>
           </p:cNvPr>
@@ -2162,7 +2162,7 @@
           <p:cNvPr id="3" name="日付プレースホルダー 2">
             <a:extLst>
               <a:ext uri="{FF2B5EF4-FFF2-40B4-BE49-F238E27FC236}">
-                <a16:creationId xmlns:a16="http://schemas.microsoft.com/office/drawing/2014/main" id="{47E6D8D5-305E-E4CB-03CA-771A266E6DB9}"/>
+                <a16:creationId xmlns:a16="http://schemas.microsoft.com/office/drawing/2014/main" id="{4C621313-2264-7072-1474-DA4685E8D014}"/>
               </a:ext>
             </a:extLst>
           </p:cNvPr>
@@ -2178,7 +2178,7 @@
           <a:bodyPr/>
           <a:lstStyle/>
           <a:p>
-            <a:fld id="{DF0BA341-327E-4242-8688-DA5EC4A77CBF}" type="datetimeFigureOut">
+            <a:fld id="{C82431CF-C761-478F-804C-390EDFAC065B}" type="datetimeFigureOut">
               <a:rPr kumimoji="1" lang="ja-JP" altLang="en-US" smtClean="0"/>
               <a:t>2026/7/30</a:t>
             </a:fld>
@@ -2191,7 +2191,7 @@
           <p:cNvPr id="4" name="フッター プレースホルダー 3">
             <a:extLst>
               <a:ext uri="{FF2B5EF4-FFF2-40B4-BE49-F238E27FC236}">
-                <a16:creationId xmlns:a16="http://schemas.microsoft.com/office/drawing/2014/main" id="{BD27728F-6FB4-536E-D209-635831D37761}"/>
+                <a16:creationId xmlns:a16="http://schemas.microsoft.com/office/drawing/2014/main" id="{645B2B0D-B49C-6F3F-066B-E6A4E0AE5437}"/>
               </a:ext>
             </a:extLst>
           </p:cNvPr>
@@ -2216,7 +2216,7 @@
           <p:cNvPr id="5" name="スライド番号プレースホルダー 4">
             <a:extLst>
               <a:ext uri="{FF2B5EF4-FFF2-40B4-BE49-F238E27FC236}">
-                <a16:creationId xmlns:a16="http://schemas.microsoft.com/office/drawing/2014/main" id="{D2968231-92FE-96CF-79B0-6DD3589D3153}"/>
+                <a16:creationId xmlns:a16="http://schemas.microsoft.com/office/drawing/2014/main" id="{4B23607B-B6C3-7C05-98C2-940B457AFBFA}"/>
               </a:ext>
             </a:extLst>
           </p:cNvPr>
@@ -2232,7 +2232,7 @@
           <a:bodyPr/>
           <a:lstStyle/>
           <a:p>
-            <a:fld id="{D2F7B7C4-E944-4279-872F-15C41B69375C}" type="slidenum">
+            <a:fld id="{641DED6D-F7AB-4317-AC7A-C5F80A67EA1D}" type="slidenum">
               <a:rPr kumimoji="1" lang="ja-JP" altLang="en-US" smtClean="0"/>
               <a:t>‹#›</a:t>
             </a:fld>
@@ -2243,7 +2243,7 @@
     </p:spTree>
     <p:extLst>
       <p:ext uri="{BB962C8B-B14F-4D97-AF65-F5344CB8AC3E}">
-        <p14:creationId xmlns:p14="http://schemas.microsoft.com/office/powerpoint/2010/main" val="1398199230"/>
+        <p14:creationId xmlns:p14="http://schemas.microsoft.com/office/powerpoint/2010/main" val="2122833311"/>
       </p:ext>
     </p:extLst>
   </p:cSld>
@@ -2275,7 +2275,7 @@
           <p:cNvPr id="2" name="日付プレースホルダー 1">
             <a:extLst>
               <a:ext uri="{FF2B5EF4-FFF2-40B4-BE49-F238E27FC236}">
-                <a16:creationId xmlns:a16="http://schemas.microsoft.com/office/drawing/2014/main" id="{EA51BE87-B153-4F1F-49BE-5FD26417CB5E}"/>
+                <a16:creationId xmlns:a16="http://schemas.microsoft.com/office/drawing/2014/main" id="{B4F7A42C-B83D-5663-AD9C-B1E730B1B2DC}"/>
               </a:ext>
             </a:extLst>
           </p:cNvPr>
@@ -2291,7 +2291,7 @@
           <a:bodyPr/>
           <a:lstStyle/>
           <a:p>
-            <a:fld id="{DF0BA341-327E-4242-8688-DA5EC4A77CBF}" type="datetimeFigureOut">
+            <a:fld id="{C82431CF-C761-478F-804C-390EDFAC065B}" type="datetimeFigureOut">
               <a:rPr kumimoji="1" lang="ja-JP" altLang="en-US" smtClean="0"/>
               <a:t>2026/7/30</a:t>
             </a:fld>
@@ -2304,7 +2304,7 @@
           <p:cNvPr id="3" name="フッター プレースホルダー 2">
             <a:extLst>
               <a:ext uri="{FF2B5EF4-FFF2-40B4-BE49-F238E27FC236}">
-                <a16:creationId xmlns:a16="http://schemas.microsoft.com/office/drawing/2014/main" id="{D695872D-FBD4-F2D7-1D55-DCCEDBC847D8}"/>
+                <a16:creationId xmlns:a16="http://schemas.microsoft.com/office/drawing/2014/main" id="{C068FE41-9BA0-9002-2383-94C80ADAC099}"/>
               </a:ext>
             </a:extLst>
           </p:cNvPr>
@@ -2329,7 +2329,7 @@
           <p:cNvPr id="4" name="スライド番号プレースホルダー 3">
             <a:extLst>
               <a:ext uri="{FF2B5EF4-FFF2-40B4-BE49-F238E27FC236}">
-                <a16:creationId xmlns:a16="http://schemas.microsoft.com/office/drawing/2014/main" id="{D7C03A62-092A-6989-4378-6160FE41156B}"/>
+                <a16:creationId xmlns:a16="http://schemas.microsoft.com/office/drawing/2014/main" id="{88DF978F-89B1-0309-4E46-8A0844916C8D}"/>
               </a:ext>
             </a:extLst>
           </p:cNvPr>
@@ -2345,7 +2345,7 @@
           <a:bodyPr/>
           <a:lstStyle/>
           <a:p>
-            <a:fld id="{D2F7B7C4-E944-4279-872F-15C41B69375C}" type="slidenum">
+            <a:fld id="{641DED6D-F7AB-4317-AC7A-C5F80A67EA1D}" type="slidenum">
               <a:rPr kumimoji="1" lang="ja-JP" altLang="en-US" smtClean="0"/>
               <a:t>‹#›</a:t>
             </a:fld>
@@ -2356,7 +2356,7 @@
     </p:spTree>
     <p:extLst>
       <p:ext uri="{BB962C8B-B14F-4D97-AF65-F5344CB8AC3E}">
-        <p14:creationId xmlns:p14="http://schemas.microsoft.com/office/powerpoint/2010/main" val="3624877806"/>
+        <p14:creationId xmlns:p14="http://schemas.microsoft.com/office/powerpoint/2010/main" val="136555114"/>
       </p:ext>
     </p:extLst>
   </p:cSld>
@@ -2388,7 +2388,7 @@
           <p:cNvPr id="2" name="タイトル 1">
             <a:extLst>
               <a:ext uri="{FF2B5EF4-FFF2-40B4-BE49-F238E27FC236}">
-                <a16:creationId xmlns:a16="http://schemas.microsoft.com/office/drawing/2014/main" id="{280F9571-0456-5D6A-F590-3F6B13110929}"/>
+                <a16:creationId xmlns:a16="http://schemas.microsoft.com/office/drawing/2014/main" id="{DB85F4EA-18E5-A814-4A37-61D377C3F639}"/>
               </a:ext>
             </a:extLst>
           </p:cNvPr>
@@ -2425,7 +2425,7 @@
           <p:cNvPr id="3" name="コンテンツ プレースホルダー 2">
             <a:extLst>
               <a:ext uri="{FF2B5EF4-FFF2-40B4-BE49-F238E27FC236}">
-                <a16:creationId xmlns:a16="http://schemas.microsoft.com/office/drawing/2014/main" id="{55DF6BDE-A424-C43F-D052-51721FAD427A}"/>
+                <a16:creationId xmlns:a16="http://schemas.microsoft.com/office/drawing/2014/main" id="{90B874EA-68D3-1F0C-CB5A-54249C3785C5}"/>
               </a:ext>
             </a:extLst>
           </p:cNvPr>
@@ -2547,7 +2547,7 @@
           <p:cNvPr id="4" name="テキスト プレースホルダー 3">
             <a:extLst>
               <a:ext uri="{FF2B5EF4-FFF2-40B4-BE49-F238E27FC236}">
-                <a16:creationId xmlns:a16="http://schemas.microsoft.com/office/drawing/2014/main" id="{F531FC7C-75FD-09A1-79D4-2DDA4FEC150C}"/>
+                <a16:creationId xmlns:a16="http://schemas.microsoft.com/office/drawing/2014/main" id="{AD4BB0A0-E7AF-497C-CE2F-13B49AF5E83E}"/>
               </a:ext>
             </a:extLst>
           </p:cNvPr>
@@ -2618,7 +2618,7 @@
           <p:cNvPr id="5" name="日付プレースホルダー 4">
             <a:extLst>
               <a:ext uri="{FF2B5EF4-FFF2-40B4-BE49-F238E27FC236}">
-                <a16:creationId xmlns:a16="http://schemas.microsoft.com/office/drawing/2014/main" id="{AC669B49-0E62-25F3-164C-109301EFC940}"/>
+                <a16:creationId xmlns:a16="http://schemas.microsoft.com/office/drawing/2014/main" id="{3C611E26-C16F-BB32-246E-26F550C90A41}"/>
               </a:ext>
             </a:extLst>
           </p:cNvPr>
@@ -2634,7 +2634,7 @@
           <a:bodyPr/>
           <a:lstStyle/>
           <a:p>
-            <a:fld id="{DF0BA341-327E-4242-8688-DA5EC4A77CBF}" type="datetimeFigureOut">
+            <a:fld id="{C82431CF-C761-478F-804C-390EDFAC065B}" type="datetimeFigureOut">
               <a:rPr kumimoji="1" lang="ja-JP" altLang="en-US" smtClean="0"/>
               <a:t>2026/7/30</a:t>
             </a:fld>
@@ -2647,7 +2647,7 @@
           <p:cNvPr id="6" name="フッター プレースホルダー 5">
             <a:extLst>
               <a:ext uri="{FF2B5EF4-FFF2-40B4-BE49-F238E27FC236}">
-                <a16:creationId xmlns:a16="http://schemas.microsoft.com/office/drawing/2014/main" id="{FF0540AF-6415-C802-FDB2-8F74CB4AA1B0}"/>
+                <a16:creationId xmlns:a16="http://schemas.microsoft.com/office/drawing/2014/main" id="{17E36B8C-EE93-02AA-F072-A15A8D0FE958}"/>
               </a:ext>
             </a:extLst>
           </p:cNvPr>
@@ -2672,7 +2672,7 @@
           <p:cNvPr id="7" name="スライド番号プレースホルダー 6">
             <a:extLst>
               <a:ext uri="{FF2B5EF4-FFF2-40B4-BE49-F238E27FC236}">
-                <a16:creationId xmlns:a16="http://schemas.microsoft.com/office/drawing/2014/main" id="{1BC52DB1-398F-0674-2D7D-2AABAFA37032}"/>
+                <a16:creationId xmlns:a16="http://schemas.microsoft.com/office/drawing/2014/main" id="{3571A929-3481-B07D-A527-4AA1864F1D50}"/>
               </a:ext>
             </a:extLst>
           </p:cNvPr>
@@ -2688,7 +2688,7 @@
           <a:bodyPr/>
           <a:lstStyle/>
           <a:p>
-            <a:fld id="{D2F7B7C4-E944-4279-872F-15C41B69375C}" type="slidenum">
+            <a:fld id="{641DED6D-F7AB-4317-AC7A-C5F80A67EA1D}" type="slidenum">
               <a:rPr kumimoji="1" lang="ja-JP" altLang="en-US" smtClean="0"/>
               <a:t>‹#›</a:t>
             </a:fld>
@@ -2699,7 +2699,7 @@
     </p:spTree>
     <p:extLst>
       <p:ext uri="{BB962C8B-B14F-4D97-AF65-F5344CB8AC3E}">
-        <p14:creationId xmlns:p14="http://schemas.microsoft.com/office/powerpoint/2010/main" val="355533923"/>
+        <p14:creationId xmlns:p14="http://schemas.microsoft.com/office/powerpoint/2010/main" val="1898059829"/>
       </p:ext>
     </p:extLst>
   </p:cSld>
@@ -2731,7 +2731,7 @@
           <p:cNvPr id="2" name="タイトル 1">
             <a:extLst>
               <a:ext uri="{FF2B5EF4-FFF2-40B4-BE49-F238E27FC236}">
-                <a16:creationId xmlns:a16="http://schemas.microsoft.com/office/drawing/2014/main" id="{50103D6B-7A26-B770-2E80-FA76A05EC875}"/>
+                <a16:creationId xmlns:a16="http://schemas.microsoft.com/office/drawing/2014/main" id="{57EDAA80-ED32-5B34-7BA8-71407B8A5ED8}"/>
               </a:ext>
             </a:extLst>
           </p:cNvPr>
@@ -2768,7 +2768,7 @@
           <p:cNvPr id="3" name="図プレースホルダー 2">
             <a:extLst>
               <a:ext uri="{FF2B5EF4-FFF2-40B4-BE49-F238E27FC236}">
-                <a16:creationId xmlns:a16="http://schemas.microsoft.com/office/drawing/2014/main" id="{AF89DC41-CB3B-F600-7716-2C168006AA9A}"/>
+                <a16:creationId xmlns:a16="http://schemas.microsoft.com/office/drawing/2014/main" id="{E14D5C3F-1A8A-D93C-FCA7-182C69ED0632}"/>
               </a:ext>
             </a:extLst>
           </p:cNvPr>
@@ -2835,7 +2835,7 @@
           <p:cNvPr id="4" name="テキスト プレースホルダー 3">
             <a:extLst>
               <a:ext uri="{FF2B5EF4-FFF2-40B4-BE49-F238E27FC236}">
-                <a16:creationId xmlns:a16="http://schemas.microsoft.com/office/drawing/2014/main" id="{123448D3-5813-F287-2701-314453018783}"/>
+                <a16:creationId xmlns:a16="http://schemas.microsoft.com/office/drawing/2014/main" id="{6B483F69-6216-7574-280C-D90254AB6C67}"/>
               </a:ext>
             </a:extLst>
           </p:cNvPr>
@@ -2906,7 +2906,7 @@
           <p:cNvPr id="5" name="日付プレースホルダー 4">
             <a:extLst>
               <a:ext uri="{FF2B5EF4-FFF2-40B4-BE49-F238E27FC236}">
-                <a16:creationId xmlns:a16="http://schemas.microsoft.com/office/drawing/2014/main" id="{A5DEB397-33E3-1F26-A0AD-2784B6EA58D1}"/>
+                <a16:creationId xmlns:a16="http://schemas.microsoft.com/office/drawing/2014/main" id="{C0DC2E57-8320-E5AF-8D8F-3AE6AEF6A67F}"/>
               </a:ext>
             </a:extLst>
           </p:cNvPr>
@@ -2922,7 +2922,7 @@
           <a:bodyPr/>
           <a:lstStyle/>
           <a:p>
-            <a:fld id="{DF0BA341-327E-4242-8688-DA5EC4A77CBF}" type="datetimeFigureOut">
+            <a:fld id="{C82431CF-C761-478F-804C-390EDFAC065B}" type="datetimeFigureOut">
               <a:rPr kumimoji="1" lang="ja-JP" altLang="en-US" smtClean="0"/>
               <a:t>2026/7/30</a:t>
             </a:fld>
@@ -2935,7 +2935,7 @@
           <p:cNvPr id="6" name="フッター プレースホルダー 5">
             <a:extLst>
               <a:ext uri="{FF2B5EF4-FFF2-40B4-BE49-F238E27FC236}">
-                <a16:creationId xmlns:a16="http://schemas.microsoft.com/office/drawing/2014/main" id="{A37F2A5A-D3F6-3832-6C43-33ABB47217B8}"/>
+                <a16:creationId xmlns:a16="http://schemas.microsoft.com/office/drawing/2014/main" id="{B3BD65B2-74FB-71CC-0417-43A39D059320}"/>
               </a:ext>
             </a:extLst>
           </p:cNvPr>
@@ -2960,7 +2960,7 @@
           <p:cNvPr id="7" name="スライド番号プレースホルダー 6">
             <a:extLst>
               <a:ext uri="{FF2B5EF4-FFF2-40B4-BE49-F238E27FC236}">
-                <a16:creationId xmlns:a16="http://schemas.microsoft.com/office/drawing/2014/main" id="{265B1827-B887-6C22-EDCE-2F3ECAC44869}"/>
+                <a16:creationId xmlns:a16="http://schemas.microsoft.com/office/drawing/2014/main" id="{2CB11747-A712-74DB-834E-5203636C7BB6}"/>
               </a:ext>
             </a:extLst>
           </p:cNvPr>
@@ -2976,7 +2976,7 @@
           <a:bodyPr/>
           <a:lstStyle/>
           <a:p>
-            <a:fld id="{D2F7B7C4-E944-4279-872F-15C41B69375C}" type="slidenum">
+            <a:fld id="{641DED6D-F7AB-4317-AC7A-C5F80A67EA1D}" type="slidenum">
               <a:rPr kumimoji="1" lang="ja-JP" altLang="en-US" smtClean="0"/>
               <a:t>‹#›</a:t>
             </a:fld>
@@ -2987,7 +2987,7 @@
     </p:spTree>
     <p:extLst>
       <p:ext uri="{BB962C8B-B14F-4D97-AF65-F5344CB8AC3E}">
-        <p14:creationId xmlns:p14="http://schemas.microsoft.com/office/powerpoint/2010/main" val="2548981179"/>
+        <p14:creationId xmlns:p14="http://schemas.microsoft.com/office/powerpoint/2010/main" val="3237222353"/>
       </p:ext>
     </p:extLst>
   </p:cSld>
@@ -3024,7 +3024,7 @@
           <p:cNvPr id="2" name="タイトル プレースホルダー 1">
             <a:extLst>
               <a:ext uri="{FF2B5EF4-FFF2-40B4-BE49-F238E27FC236}">
-                <a16:creationId xmlns:a16="http://schemas.microsoft.com/office/drawing/2014/main" id="{67D8E75D-0957-C9E8-5CEF-723B3E04DED0}"/>
+                <a16:creationId xmlns:a16="http://schemas.microsoft.com/office/drawing/2014/main" id="{8C8D81F4-B5C2-EAFB-DC32-71AD295DEBA7}"/>
               </a:ext>
             </a:extLst>
           </p:cNvPr>
@@ -3062,7 +3062,7 @@
           <p:cNvPr id="3" name="テキスト プレースホルダー 2">
             <a:extLst>
               <a:ext uri="{FF2B5EF4-FFF2-40B4-BE49-F238E27FC236}">
-                <a16:creationId xmlns:a16="http://schemas.microsoft.com/office/drawing/2014/main" id="{818CE8DF-CAC5-12E3-0056-A5228AB83B73}"/>
+                <a16:creationId xmlns:a16="http://schemas.microsoft.com/office/drawing/2014/main" id="{EF0FE959-47C8-4007-6F5B-88D3F9CDAA49}"/>
               </a:ext>
             </a:extLst>
           </p:cNvPr>
@@ -3161,7 +3161,7 @@
           <p:cNvPr id="4" name="日付プレースホルダー 3">
             <a:extLst>
               <a:ext uri="{FF2B5EF4-FFF2-40B4-BE49-F238E27FC236}">
-                <a16:creationId xmlns:a16="http://schemas.microsoft.com/office/drawing/2014/main" id="{21B4B2F9-39EE-BDB4-EE45-76176FE3D181}"/>
+                <a16:creationId xmlns:a16="http://schemas.microsoft.com/office/drawing/2014/main" id="{19CFF326-DC80-4730-F757-0B5554DC2EDD}"/>
               </a:ext>
             </a:extLst>
           </p:cNvPr>
@@ -3195,7 +3195,7 @@
             </a:lvl1pPr>
           </a:lstStyle>
           <a:p>
-            <a:fld id="{DF0BA341-327E-4242-8688-DA5EC4A77CBF}" type="datetimeFigureOut">
+            <a:fld id="{C82431CF-C761-478F-804C-390EDFAC065B}" type="datetimeFigureOut">
               <a:rPr kumimoji="1" lang="ja-JP" altLang="en-US" smtClean="0"/>
               <a:t>2026/7/30</a:t>
             </a:fld>
@@ -3208,7 +3208,7 @@
           <p:cNvPr id="5" name="フッター プレースホルダー 4">
             <a:extLst>
               <a:ext uri="{FF2B5EF4-FFF2-40B4-BE49-F238E27FC236}">
-                <a16:creationId xmlns:a16="http://schemas.microsoft.com/office/drawing/2014/main" id="{920B1F46-B61B-7736-970E-0465B65587D9}"/>
+                <a16:creationId xmlns:a16="http://schemas.microsoft.com/office/drawing/2014/main" id="{0F75F984-5654-74A4-47CC-73D5120671B5}"/>
               </a:ext>
             </a:extLst>
           </p:cNvPr>
@@ -3251,7 +3251,7 @@
           <p:cNvPr id="6" name="スライド番号プレースホルダー 5">
             <a:extLst>
               <a:ext uri="{FF2B5EF4-FFF2-40B4-BE49-F238E27FC236}">
-                <a16:creationId xmlns:a16="http://schemas.microsoft.com/office/drawing/2014/main" id="{A866B10A-5163-FEF0-81F0-886F5B47CF97}"/>
+                <a16:creationId xmlns:a16="http://schemas.microsoft.com/office/drawing/2014/main" id="{C658B904-EBA6-71DF-000A-1AA40FA3682C}"/>
               </a:ext>
             </a:extLst>
           </p:cNvPr>
@@ -3285,7 +3285,7 @@
             </a:lvl1pPr>
           </a:lstStyle>
           <a:p>
-            <a:fld id="{D2F7B7C4-E944-4279-872F-15C41B69375C}" type="slidenum">
+            <a:fld id="{641DED6D-F7AB-4317-AC7A-C5F80A67EA1D}" type="slidenum">
               <a:rPr kumimoji="1" lang="ja-JP" altLang="en-US" smtClean="0"/>
               <a:t>‹#›</a:t>
             </a:fld>
@@ -3296,7 +3296,7 @@
     </p:spTree>
     <p:extLst>
       <p:ext uri="{BB962C8B-B14F-4D97-AF65-F5344CB8AC3E}">
-        <p14:creationId xmlns:p14="http://schemas.microsoft.com/office/powerpoint/2010/main" val="225735406"/>
+        <p14:creationId xmlns:p14="http://schemas.microsoft.com/office/powerpoint/2010/main" val="2870291255"/>
       </p:ext>
     </p:extLst>
   </p:cSld>
@@ -3619,7 +3619,7 @@
           <p:cNvPr id="2" name="テキスト ボックス 1">
             <a:extLst>
               <a:ext uri="{FF2B5EF4-FFF2-40B4-BE49-F238E27FC236}">
-                <a16:creationId xmlns:a16="http://schemas.microsoft.com/office/drawing/2014/main" id="{CAC69468-5AC8-DD38-8AA4-FADB53D87CED}"/>
+                <a16:creationId xmlns:a16="http://schemas.microsoft.com/office/drawing/2014/main" id="{9D0CA292-0DD5-26E0-E1E8-5F9BC769CEB5}"/>
               </a:ext>
             </a:extLst>
           </p:cNvPr>
@@ -3665,7 +3665,7 @@
           <p:cNvPr id="3" name="テキスト ボックス 2">
             <a:extLst>
               <a:ext uri="{FF2B5EF4-FFF2-40B4-BE49-F238E27FC236}">
-                <a16:creationId xmlns:a16="http://schemas.microsoft.com/office/drawing/2014/main" id="{3F87B6D3-5C60-5A4D-3E54-8C3FB9732758}"/>
+                <a16:creationId xmlns:a16="http://schemas.microsoft.com/office/drawing/2014/main" id="{158DBDE2-0542-25A5-6CA4-342BD398E122}"/>
               </a:ext>
             </a:extLst>
           </p:cNvPr>
@@ -3714,7 +3714,7 @@
           <p:cNvPr id="4" name="テキスト ボックス 3">
             <a:extLst>
               <a:ext uri="{FF2B5EF4-FFF2-40B4-BE49-F238E27FC236}">
-                <a16:creationId xmlns:a16="http://schemas.microsoft.com/office/drawing/2014/main" id="{302AF9F6-4D3C-4F23-002C-162DBCB4E14E}"/>
+                <a16:creationId xmlns:a16="http://schemas.microsoft.com/office/drawing/2014/main" id="{624F4109-71EF-E1F1-8ED7-49172887B1C2}"/>
               </a:ext>
             </a:extLst>
           </p:cNvPr>
@@ -3754,7 +3754,7 @@
           <p:cNvPr id="5" name="テキスト ボックス 4">
             <a:extLst>
               <a:ext uri="{FF2B5EF4-FFF2-40B4-BE49-F238E27FC236}">
-                <a16:creationId xmlns:a16="http://schemas.microsoft.com/office/drawing/2014/main" id="{DC9741C0-2EFC-C3C1-3523-C9C61DBC1681}"/>
+                <a16:creationId xmlns:a16="http://schemas.microsoft.com/office/drawing/2014/main" id="{EC0AD205-3EBA-38C2-A21C-F63A9EE79434}"/>
               </a:ext>
             </a:extLst>
           </p:cNvPr>
@@ -3801,7 +3801,7 @@
             <a:hlinkClick r:id="" action="ppaction://media"/>
             <a:extLst>
               <a:ext uri="{FF2B5EF4-FFF2-40B4-BE49-F238E27FC236}">
-                <a16:creationId xmlns:a16="http://schemas.microsoft.com/office/drawing/2014/main" id="{D6FC575B-8F4E-8105-0A88-F82A271B794C}"/>
+                <a16:creationId xmlns:a16="http://schemas.microsoft.com/office/drawing/2014/main" id="{BB2C0848-5743-F0AE-BCD3-FD0A5FA45017}"/>
               </a:ext>
             </a:extLst>
           </p:cNvPr>
@@ -3836,7 +3836,7 @@
     </p:spTree>
     <p:extLst>
       <p:ext uri="{BB962C8B-B14F-4D97-AF65-F5344CB8AC3E}">
-        <p14:creationId xmlns:p14="http://schemas.microsoft.com/office/powerpoint/2010/main" val="703700121"/>
+        <p14:creationId xmlns:p14="http://schemas.microsoft.com/office/powerpoint/2010/main" val="1985183311"/>
       </p:ext>
     </p:extLst>
   </p:cSld>
@@ -3960,7 +3960,7 @@
           <p:cNvPr id="2" name="テキスト ボックス 1">
             <a:extLst>
               <a:ext uri="{FF2B5EF4-FFF2-40B4-BE49-F238E27FC236}">
-                <a16:creationId xmlns:a16="http://schemas.microsoft.com/office/drawing/2014/main" id="{3EEC784A-E8CD-CFFE-4C4C-5EC9A28AFF94}"/>
+                <a16:creationId xmlns:a16="http://schemas.microsoft.com/office/drawing/2014/main" id="{9046A8CD-ADC5-7B53-33BD-B3C0A40E6BE8}"/>
               </a:ext>
             </a:extLst>
           </p:cNvPr>
@@ -4006,7 +4006,7 @@
           <p:cNvPr id="3" name="テキスト ボックス 2">
             <a:extLst>
               <a:ext uri="{FF2B5EF4-FFF2-40B4-BE49-F238E27FC236}">
-                <a16:creationId xmlns:a16="http://schemas.microsoft.com/office/drawing/2014/main" id="{6C71B1CD-8F35-1CA0-E26D-6D7ECC2103D1}"/>
+                <a16:creationId xmlns:a16="http://schemas.microsoft.com/office/drawing/2014/main" id="{61398946-2BF3-977A-361C-6739E3440CFD}"/>
               </a:ext>
             </a:extLst>
           </p:cNvPr>
@@ -4046,7 +4046,7 @@
           <p:cNvPr id="4" name="テキスト ボックス 3">
             <a:extLst>
               <a:ext uri="{FF2B5EF4-FFF2-40B4-BE49-F238E27FC236}">
-                <a16:creationId xmlns:a16="http://schemas.microsoft.com/office/drawing/2014/main" id="{072BF782-59FD-AF84-9A46-BB9A0DA49B2D}"/>
+                <a16:creationId xmlns:a16="http://schemas.microsoft.com/office/drawing/2014/main" id="{78A73F6C-48EE-32CA-73DD-953B390ECF8E}"/>
               </a:ext>
             </a:extLst>
           </p:cNvPr>
@@ -4076,14 +4076,17 @@
                 </a:solidFill>
                 <a:latin typeface="Arial" panose="020B0604020202020204" pitchFamily="34" charset="0"/>
               </a:rPr>
-              <a:t>About Laravel Laravel is a web application framework with expressive, elegant syntax</a:t>
-            </a:r>
-            <a:endParaRPr kumimoji="1" lang="ja-JP" altLang="en-US" sz="2000">
-              <a:solidFill>
-                <a:srgbClr val="333333"/>
-              </a:solidFill>
-              <a:latin typeface="Arial" panose="020B0604020202020204" pitchFamily="34" charset="0"/>
-            </a:endParaRPr>
+              <a:t>Maportal</a:t>
+            </a:r>
+            <a:r>
+              <a:rPr kumimoji="1" lang="ja-JP" altLang="en-US" sz="2000">
+                <a:solidFill>
+                  <a:srgbClr val="333333"/>
+                </a:solidFill>
+                <a:latin typeface="Arial" panose="020B0604020202020204" pitchFamily="34" charset="0"/>
+              </a:rPr>
+              <a:t>の目的、構成、実装を公開コードから確認できるプロジェクトです。</a:t>
+            </a:r>
           </a:p>
         </p:txBody>
       </p:sp>
@@ -4092,7 +4095,7 @@
           <p:cNvPr id="5" name="テキスト ボックス 4">
             <a:extLst>
               <a:ext uri="{FF2B5EF4-FFF2-40B4-BE49-F238E27FC236}">
-                <a16:creationId xmlns:a16="http://schemas.microsoft.com/office/drawing/2014/main" id="{009680A3-2D75-A9DC-ED41-565804B839EB}"/>
+                <a16:creationId xmlns:a16="http://schemas.microsoft.com/office/drawing/2014/main" id="{DAE4AEDE-F19E-1EF3-5688-0B67B1005B9C}"/>
               </a:ext>
             </a:extLst>
           </p:cNvPr>
@@ -4139,7 +4142,7 @@
             <a:hlinkClick r:id="" action="ppaction://media"/>
             <a:extLst>
               <a:ext uri="{FF2B5EF4-FFF2-40B4-BE49-F238E27FC236}">
-                <a16:creationId xmlns:a16="http://schemas.microsoft.com/office/drawing/2014/main" id="{C1217BA0-FAAE-A2F0-4464-9E5355ACB528}"/>
+                <a16:creationId xmlns:a16="http://schemas.microsoft.com/office/drawing/2014/main" id="{0F7C6077-E0C2-8C2A-17F4-74C38D64D565}"/>
               </a:ext>
             </a:extLst>
           </p:cNvPr>
@@ -4174,7 +4177,7 @@
     </p:spTree>
     <p:extLst>
       <p:ext uri="{BB962C8B-B14F-4D97-AF65-F5344CB8AC3E}">
-        <p14:creationId xmlns:p14="http://schemas.microsoft.com/office/powerpoint/2010/main" val="1251349067"/>
+        <p14:creationId xmlns:p14="http://schemas.microsoft.com/office/powerpoint/2010/main" val="2918920926"/>
       </p:ext>
     </p:extLst>
   </p:cSld>
@@ -4183,10 +4186,10 @@
   </p:clrMapOvr>
   <mc:AlternateContent xmlns:mc="http://schemas.openxmlformats.org/markup-compatibility/2006">
     <mc:Choice xmlns:p14="http://schemas.microsoft.com/office/powerpoint/2010/main" Requires="p14">
-      <p:transition spd="slow" p14:dur="2000" advTm="8000"/>
+      <p:transition spd="slow" p14:dur="2000" advTm="7000"/>
     </mc:Choice>
     <mc:Fallback>
-      <p:transition spd="slow" advTm="8000"/>
+      <p:transition spd="slow" advTm="7000"/>
     </mc:Fallback>
   </mc:AlternateContent>
   <p:timing>
@@ -4217,7 +4220,7 @@
                                   <p:childTnLst>
                                     <p:cmd type="call" cmd="playFrom(0.0)">
                                       <p:cBhvr>
-                                        <p:cTn id="6" dur="7780" fill="hold"/>
+                                        <p:cTn id="6" dur="6881" fill="hold"/>
                                         <p:tgtEl>
                                           <p:spTgt spid="6"/>
                                         </p:tgtEl>
@@ -4298,7 +4301,7 @@
           <p:cNvPr id="2" name="テキスト ボックス 1">
             <a:extLst>
               <a:ext uri="{FF2B5EF4-FFF2-40B4-BE49-F238E27FC236}">
-                <a16:creationId xmlns:a16="http://schemas.microsoft.com/office/drawing/2014/main" id="{A17AAE13-BFEA-FBF9-4592-88633B0B2397}"/>
+                <a16:creationId xmlns:a16="http://schemas.microsoft.com/office/drawing/2014/main" id="{1F263016-6E91-82BE-AF0F-22CB009112A8}"/>
               </a:ext>
             </a:extLst>
           </p:cNvPr>
@@ -4344,7 +4347,7 @@
           <p:cNvPr id="3" name="テキスト ボックス 2">
             <a:extLst>
               <a:ext uri="{FF2B5EF4-FFF2-40B4-BE49-F238E27FC236}">
-                <a16:creationId xmlns:a16="http://schemas.microsoft.com/office/drawing/2014/main" id="{FA141EE8-9DBC-2AD1-D69A-77871B2A1F9A}"/>
+                <a16:creationId xmlns:a16="http://schemas.microsoft.com/office/drawing/2014/main" id="{ECF8A5D3-9060-EDAE-8761-D1D4498CA212}"/>
               </a:ext>
             </a:extLst>
           </p:cNvPr>
@@ -4384,7 +4387,7 @@
           <p:cNvPr id="4" name="テキスト ボックス 3">
             <a:extLst>
               <a:ext uri="{FF2B5EF4-FFF2-40B4-BE49-F238E27FC236}">
-                <a16:creationId xmlns:a16="http://schemas.microsoft.com/office/drawing/2014/main" id="{25DC3F6E-A960-411B-6E2B-C2114D70A248}"/>
+                <a16:creationId xmlns:a16="http://schemas.microsoft.com/office/drawing/2014/main" id="{38E8E9ED-B258-A704-B836-8C9D84501E74}"/>
               </a:ext>
             </a:extLst>
           </p:cNvPr>
@@ -4497,7 +4500,7 @@
           <p:cNvPr id="5" name="テキスト ボックス 4">
             <a:extLst>
               <a:ext uri="{FF2B5EF4-FFF2-40B4-BE49-F238E27FC236}">
-                <a16:creationId xmlns:a16="http://schemas.microsoft.com/office/drawing/2014/main" id="{A917EFEE-4F97-5C2A-96ED-D61F0DFDD8DD}"/>
+                <a16:creationId xmlns:a16="http://schemas.microsoft.com/office/drawing/2014/main" id="{F7082A5D-98D9-62F1-5628-BBBE4D1AAF4A}"/>
               </a:ext>
             </a:extLst>
           </p:cNvPr>
@@ -4544,7 +4547,7 @@
             <a:hlinkClick r:id="" action="ppaction://media"/>
             <a:extLst>
               <a:ext uri="{FF2B5EF4-FFF2-40B4-BE49-F238E27FC236}">
-                <a16:creationId xmlns:a16="http://schemas.microsoft.com/office/drawing/2014/main" id="{2C83B3D0-4153-573E-DE99-C3CE7380E7C1}"/>
+                <a16:creationId xmlns:a16="http://schemas.microsoft.com/office/drawing/2014/main" id="{B7149B39-1BA5-8614-D7A6-288F58A4027F}"/>
               </a:ext>
             </a:extLst>
           </p:cNvPr>
@@ -4579,7 +4582,7 @@
     </p:spTree>
     <p:extLst>
       <p:ext uri="{BB962C8B-B14F-4D97-AF65-F5344CB8AC3E}">
-        <p14:creationId xmlns:p14="http://schemas.microsoft.com/office/powerpoint/2010/main" val="4022056979"/>
+        <p14:creationId xmlns:p14="http://schemas.microsoft.com/office/powerpoint/2010/main" val="379820958"/>
       </p:ext>
     </p:extLst>
   </p:cSld>
@@ -4703,7 +4706,7 @@
           <p:cNvPr id="2" name="テキスト ボックス 1">
             <a:extLst>
               <a:ext uri="{FF2B5EF4-FFF2-40B4-BE49-F238E27FC236}">
-                <a16:creationId xmlns:a16="http://schemas.microsoft.com/office/drawing/2014/main" id="{50D4AEDC-1876-BF74-67D1-F44C6AAF61D1}"/>
+                <a16:creationId xmlns:a16="http://schemas.microsoft.com/office/drawing/2014/main" id="{95DBD637-151D-DAAD-3496-1519C2A233B3}"/>
               </a:ext>
             </a:extLst>
           </p:cNvPr>
@@ -4749,7 +4752,7 @@
           <p:cNvPr id="3" name="テキスト ボックス 2">
             <a:extLst>
               <a:ext uri="{FF2B5EF4-FFF2-40B4-BE49-F238E27FC236}">
-                <a16:creationId xmlns:a16="http://schemas.microsoft.com/office/drawing/2014/main" id="{41B4F670-B7EC-642D-49AE-018A394AB459}"/>
+                <a16:creationId xmlns:a16="http://schemas.microsoft.com/office/drawing/2014/main" id="{A903B170-64A0-7945-DBB8-4DCB45AC0E5A}"/>
               </a:ext>
             </a:extLst>
           </p:cNvPr>
@@ -4789,7 +4792,7 @@
           <p:cNvPr id="4" name="テキスト ボックス 3">
             <a:extLst>
               <a:ext uri="{FF2B5EF4-FFF2-40B4-BE49-F238E27FC236}">
-                <a16:creationId xmlns:a16="http://schemas.microsoft.com/office/drawing/2014/main" id="{2A60FEE1-4F9E-2AF2-B743-6C37730742F7}"/>
+                <a16:creationId xmlns:a16="http://schemas.microsoft.com/office/drawing/2014/main" id="{D9EDE2A5-94BF-B00F-2D07-769EDABAA5C2}"/>
               </a:ext>
             </a:extLst>
           </p:cNvPr>
@@ -4899,7 +4902,7 @@
           <p:cNvPr id="5" name="テキスト ボックス 4">
             <a:extLst>
               <a:ext uri="{FF2B5EF4-FFF2-40B4-BE49-F238E27FC236}">
-                <a16:creationId xmlns:a16="http://schemas.microsoft.com/office/drawing/2014/main" id="{369043E4-B405-AC63-41BF-5812E1637E45}"/>
+                <a16:creationId xmlns:a16="http://schemas.microsoft.com/office/drawing/2014/main" id="{389C859C-4173-6DA5-128E-8A2AFE7EEE04}"/>
               </a:ext>
             </a:extLst>
           </p:cNvPr>
@@ -4946,7 +4949,7 @@
             <a:hlinkClick r:id="" action="ppaction://media"/>
             <a:extLst>
               <a:ext uri="{FF2B5EF4-FFF2-40B4-BE49-F238E27FC236}">
-                <a16:creationId xmlns:a16="http://schemas.microsoft.com/office/drawing/2014/main" id="{FCE15905-80BE-6CD0-2F98-99B0D3C81F29}"/>
+                <a16:creationId xmlns:a16="http://schemas.microsoft.com/office/drawing/2014/main" id="{0B45B28C-A0FE-7797-787D-23E006E0152B}"/>
               </a:ext>
             </a:extLst>
           </p:cNvPr>
@@ -4981,7 +4984,7 @@
     </p:spTree>
     <p:extLst>
       <p:ext uri="{BB962C8B-B14F-4D97-AF65-F5344CB8AC3E}">
-        <p14:creationId xmlns:p14="http://schemas.microsoft.com/office/powerpoint/2010/main" val="3353224440"/>
+        <p14:creationId xmlns:p14="http://schemas.microsoft.com/office/powerpoint/2010/main" val="773069234"/>
       </p:ext>
     </p:extLst>
   </p:cSld>
@@ -5105,7 +5108,7 @@
           <p:cNvPr id="2" name="テキスト ボックス 1">
             <a:extLst>
               <a:ext uri="{FF2B5EF4-FFF2-40B4-BE49-F238E27FC236}">
-                <a16:creationId xmlns:a16="http://schemas.microsoft.com/office/drawing/2014/main" id="{1E081F18-9351-A7A5-8745-3395C453D98F}"/>
+                <a16:creationId xmlns:a16="http://schemas.microsoft.com/office/drawing/2014/main" id="{5C36A1FE-E486-3308-96A0-A6E2514DE2E3}"/>
               </a:ext>
             </a:extLst>
           </p:cNvPr>
@@ -5151,7 +5154,7 @@
           <p:cNvPr id="3" name="テキスト ボックス 2">
             <a:extLst>
               <a:ext uri="{FF2B5EF4-FFF2-40B4-BE49-F238E27FC236}">
-                <a16:creationId xmlns:a16="http://schemas.microsoft.com/office/drawing/2014/main" id="{9B84BA93-A7CD-C34A-0116-0693BD1E34CF}"/>
+                <a16:creationId xmlns:a16="http://schemas.microsoft.com/office/drawing/2014/main" id="{4B93EA02-93F5-FABC-1DF6-230574C3C24D}"/>
               </a:ext>
             </a:extLst>
           </p:cNvPr>
@@ -5191,7 +5194,7 @@
           <p:cNvPr id="4" name="テキスト ボックス 3">
             <a:extLst>
               <a:ext uri="{FF2B5EF4-FFF2-40B4-BE49-F238E27FC236}">
-                <a16:creationId xmlns:a16="http://schemas.microsoft.com/office/drawing/2014/main" id="{E8E39D01-A7F3-676A-41F5-81A759B011B8}"/>
+                <a16:creationId xmlns:a16="http://schemas.microsoft.com/office/drawing/2014/main" id="{E24E2F29-B279-D64F-EBFB-2E5D4D8EFD40}"/>
               </a:ext>
             </a:extLst>
           </p:cNvPr>
@@ -5201,7 +5204,7 @@
         <p:spPr>
           <a:xfrm>
             <a:off x="533400" y="3429000"/>
-            <a:ext cx="10795000" cy="707886"/>
+            <a:ext cx="10795000" cy="400110"/>
           </a:xfrm>
           <a:prstGeom prst="rect">
             <a:avLst/>
@@ -5215,76 +5218,13 @@
           <a:lstStyle/>
           <a:p>
             <a:r>
-              <a:rPr kumimoji="1" lang="en-US" altLang="ja-JP" sz="2000">
-                <a:solidFill>
-                  <a:srgbClr val="333333"/>
-                </a:solidFill>
-                <a:latin typeface="Arial" panose="020B0604020202020204" pitchFamily="34" charset="0"/>
-              </a:rPr>
-              <a:t>JSON-LD</a:t>
-            </a:r>
-            <a:r>
               <a:rPr kumimoji="1" lang="ja-JP" altLang="en-US" sz="2000">
                 <a:solidFill>
                   <a:srgbClr val="333333"/>
                 </a:solidFill>
                 <a:latin typeface="Arial" panose="020B0604020202020204" pitchFamily="34" charset="0"/>
               </a:rPr>
-              <a:t>の</a:t>
-            </a:r>
-            <a:r>
-              <a:rPr kumimoji="1" lang="en-US" altLang="ja-JP" sz="2000">
-                <a:solidFill>
-                  <a:srgbClr val="333333"/>
-                </a:solidFill>
-                <a:latin typeface="Arial" panose="020B0604020202020204" pitchFamily="34" charset="0"/>
-              </a:rPr>
-              <a:t>blade</a:t>
-            </a:r>
-            <a:r>
-              <a:rPr kumimoji="1" lang="ja-JP" altLang="en-US" sz="2000">
-                <a:solidFill>
-                  <a:srgbClr val="333333"/>
-                </a:solidFill>
-                <a:latin typeface="Arial" panose="020B0604020202020204" pitchFamily="34" charset="0"/>
-              </a:rPr>
-              <a:t>テンプレートで</a:t>
-            </a:r>
-            <a:r>
-              <a:rPr kumimoji="1" lang="en-US" altLang="ja-JP" sz="2000">
-                <a:solidFill>
-                  <a:srgbClr val="333333"/>
-                </a:solidFill>
-                <a:latin typeface="Arial" panose="020B0604020202020204" pitchFamily="34" charset="0"/>
-              </a:rPr>
-              <a:t>@context</a:t>
-            </a:r>
-            <a:r>
-              <a:rPr kumimoji="1" lang="ja-JP" altLang="en-US" sz="2000">
-                <a:solidFill>
-                  <a:srgbClr val="333333"/>
-                </a:solidFill>
-                <a:latin typeface="Arial" panose="020B0604020202020204" pitchFamily="34" charset="0"/>
-              </a:rPr>
-              <a:t>が</a:t>
-            </a:r>
-            <a:r>
-              <a:rPr kumimoji="1" lang="en-US" altLang="ja-JP" sz="2000">
-                <a:solidFill>
-                  <a:srgbClr val="333333"/>
-                </a:solidFill>
-                <a:latin typeface="Arial" panose="020B0604020202020204" pitchFamily="34" charset="0"/>
-              </a:rPr>
-              <a:t>Laravel</a:t>
-            </a:r>
-            <a:r>
-              <a:rPr kumimoji="1" lang="ja-JP" altLang="en-US" sz="2000">
-                <a:solidFill>
-                  <a:srgbClr val="333333"/>
-                </a:solidFill>
-                <a:latin typeface="Arial" panose="020B0604020202020204" pitchFamily="34" charset="0"/>
-              </a:rPr>
-              <a:t>の予約ディレクティブと衝突していたバグを修正</a:t>
+              <a:t>直近のコミットでは、実装の見直しと継続的な改善が行われました。</a:t>
             </a:r>
           </a:p>
         </p:txBody>
@@ -5294,7 +5234,7 @@
           <p:cNvPr id="5" name="テキスト ボックス 4">
             <a:extLst>
               <a:ext uri="{FF2B5EF4-FFF2-40B4-BE49-F238E27FC236}">
-                <a16:creationId xmlns:a16="http://schemas.microsoft.com/office/drawing/2014/main" id="{BEF63A9F-76D0-E29B-D5CE-40DD543F439B}"/>
+                <a16:creationId xmlns:a16="http://schemas.microsoft.com/office/drawing/2014/main" id="{3386A6F1-594A-6098-78E5-06A346B3A9F8}"/>
               </a:ext>
             </a:extLst>
           </p:cNvPr>
@@ -5341,7 +5281,7 @@
             <a:hlinkClick r:id="" action="ppaction://media"/>
             <a:extLst>
               <a:ext uri="{FF2B5EF4-FFF2-40B4-BE49-F238E27FC236}">
-                <a16:creationId xmlns:a16="http://schemas.microsoft.com/office/drawing/2014/main" id="{8E996788-EB57-AE27-9736-D9B710A575B3}"/>
+                <a16:creationId xmlns:a16="http://schemas.microsoft.com/office/drawing/2014/main" id="{9E58506A-9D6E-9F22-FC7C-EB5C12505F43}"/>
               </a:ext>
             </a:extLst>
           </p:cNvPr>
@@ -5376,7 +5316,7 @@
     </p:spTree>
     <p:extLst>
       <p:ext uri="{BB962C8B-B14F-4D97-AF65-F5344CB8AC3E}">
-        <p14:creationId xmlns:p14="http://schemas.microsoft.com/office/powerpoint/2010/main" val="1383090282"/>
+        <p14:creationId xmlns:p14="http://schemas.microsoft.com/office/powerpoint/2010/main" val="3294439024"/>
       </p:ext>
     </p:extLst>
   </p:cSld>
@@ -5385,10 +5325,10 @@
   </p:clrMapOvr>
   <mc:AlternateContent xmlns:mc="http://schemas.openxmlformats.org/markup-compatibility/2006">
     <mc:Choice xmlns:p14="http://schemas.microsoft.com/office/powerpoint/2010/main" Requires="p14">
-      <p:transition spd="slow" p14:dur="2000" advTm="12000"/>
+      <p:transition spd="slow" p14:dur="2000" advTm="7000"/>
     </mc:Choice>
     <mc:Fallback>
-      <p:transition spd="slow" advTm="12000"/>
+      <p:transition spd="slow" advTm="7000"/>
     </mc:Fallback>
   </mc:AlternateContent>
   <p:timing>
@@ -5419,7 +5359,7 @@
                                   <p:childTnLst>
                                     <p:cmd type="call" cmd="playFrom(0.0)">
                                       <p:cBhvr>
-                                        <p:cTn id="6" dur="11394" fill="hold"/>
+                                        <p:cTn id="6" dur="6076" fill="hold"/>
                                         <p:tgtEl>
                                           <p:spTgt spid="6"/>
                                         </p:tgtEl>
@@ -5500,7 +5440,7 @@
           <p:cNvPr id="2" name="テキスト ボックス 1">
             <a:extLst>
               <a:ext uri="{FF2B5EF4-FFF2-40B4-BE49-F238E27FC236}">
-                <a16:creationId xmlns:a16="http://schemas.microsoft.com/office/drawing/2014/main" id="{1EF7B762-32DF-8180-FB76-F314B5F2A010}"/>
+                <a16:creationId xmlns:a16="http://schemas.microsoft.com/office/drawing/2014/main" id="{339DD896-0AB4-9563-A05B-483D04C4B890}"/>
               </a:ext>
             </a:extLst>
           </p:cNvPr>
@@ -5546,7 +5486,7 @@
           <p:cNvPr id="3" name="テキスト ボックス 2">
             <a:extLst>
               <a:ext uri="{FF2B5EF4-FFF2-40B4-BE49-F238E27FC236}">
-                <a16:creationId xmlns:a16="http://schemas.microsoft.com/office/drawing/2014/main" id="{108BA1CC-B92F-979D-24C7-5CD0ED0253FF}"/>
+                <a16:creationId xmlns:a16="http://schemas.microsoft.com/office/drawing/2014/main" id="{5FB8D739-5C98-869F-112D-D0749C86706B}"/>
               </a:ext>
             </a:extLst>
           </p:cNvPr>
@@ -5586,7 +5526,7 @@
           <p:cNvPr id="4" name="テキスト ボックス 3">
             <a:extLst>
               <a:ext uri="{FF2B5EF4-FFF2-40B4-BE49-F238E27FC236}">
-                <a16:creationId xmlns:a16="http://schemas.microsoft.com/office/drawing/2014/main" id="{E5493A70-A66D-C6CE-20F7-F59590BE6E1C}"/>
+                <a16:creationId xmlns:a16="http://schemas.microsoft.com/office/drawing/2014/main" id="{2CCD7E91-C7C0-94F1-731F-029F88D41DCE}"/>
               </a:ext>
             </a:extLst>
           </p:cNvPr>
@@ -5651,7 +5591,7 @@
           <p:cNvPr id="5" name="テキスト ボックス 4">
             <a:extLst>
               <a:ext uri="{FF2B5EF4-FFF2-40B4-BE49-F238E27FC236}">
-                <a16:creationId xmlns:a16="http://schemas.microsoft.com/office/drawing/2014/main" id="{B2E9F15A-3B77-A974-F50E-2C6009182D5D}"/>
+                <a16:creationId xmlns:a16="http://schemas.microsoft.com/office/drawing/2014/main" id="{D4C4B90C-7B9D-B3A2-6FFF-305A6C41E83E}"/>
               </a:ext>
             </a:extLst>
           </p:cNvPr>
@@ -5698,7 +5638,7 @@
             <a:hlinkClick r:id="" action="ppaction://media"/>
             <a:extLst>
               <a:ext uri="{FF2B5EF4-FFF2-40B4-BE49-F238E27FC236}">
-                <a16:creationId xmlns:a16="http://schemas.microsoft.com/office/drawing/2014/main" id="{B60A3D35-1696-D2EF-AB63-624F69DACD3D}"/>
+                <a16:creationId xmlns:a16="http://schemas.microsoft.com/office/drawing/2014/main" id="{B7E95170-B97D-1D5B-63D4-4846C13815AB}"/>
               </a:ext>
             </a:extLst>
           </p:cNvPr>
@@ -5733,7 +5673,7 @@
     </p:spTree>
     <p:extLst>
       <p:ext uri="{BB962C8B-B14F-4D97-AF65-F5344CB8AC3E}">
-        <p14:creationId xmlns:p14="http://schemas.microsoft.com/office/powerpoint/2010/main" val="4271392818"/>
+        <p14:creationId xmlns:p14="http://schemas.microsoft.com/office/powerpoint/2010/main" val="4268446839"/>
       </p:ext>
     </p:extLst>
   </p:cSld>
